--- a/Stage1-C++-Beginner/2789-First Encounter/2789-First Encounter.pptx
+++ b/Stage1-C++-Beginner/2789-First Encounter/2789-First Encounter.pptx
@@ -148,890 +148,6 @@
 </p:presentation>
 </file>
 
-<file path=ppt/changesInfos/changesInfo1.xml><?xml version="1.0" encoding="utf-8"?>
-<pc:chgInfo xmlns:a="http://schemas.openxmlformats.org/drawingml/2006/main" xmlns:r="http://schemas.openxmlformats.org/officeDocument/2006/relationships" xmlns:ac="http://schemas.microsoft.com/office/drawing/2013/main/command" xmlns:pc="http://schemas.microsoft.com/office/powerpoint/2013/main/command">
-  <pc:docChgLst>
-    <pc:chgData name="Bryan Sun" userId="851caa7714272873" providerId="LiveId" clId="{1A8111D1-4A65-4A29-9DEE-6B0D34390FD8}"/>
-    <pc:docChg chg="custSel modSld">
-      <pc:chgData name="Bryan Sun" userId="851caa7714272873" providerId="LiveId" clId="{1A8111D1-4A65-4A29-9DEE-6B0D34390FD8}" dt="2026-03-27T10:34:15.553" v="17" actId="20577"/>
-      <pc:docMkLst>
-        <pc:docMk/>
-      </pc:docMkLst>
-      <pc:sldChg chg="modSp mod">
-        <pc:chgData name="Bryan Sun" userId="851caa7714272873" providerId="LiveId" clId="{1A8111D1-4A65-4A29-9DEE-6B0D34390FD8}" dt="2026-03-27T08:55:10.036" v="14" actId="313"/>
-        <pc:sldMkLst>
-          <pc:docMk/>
-          <pc:sldMk cId="0" sldId="256"/>
-        </pc:sldMkLst>
-        <pc:spChg chg="mod">
-          <ac:chgData name="Bryan Sun" userId="851caa7714272873" providerId="LiveId" clId="{1A8111D1-4A65-4A29-9DEE-6B0D34390FD8}" dt="2026-03-27T08:55:10.036" v="14" actId="313"/>
-          <ac:spMkLst>
-            <pc:docMk/>
-            <pc:sldMk cId="0" sldId="256"/>
-            <ac:spMk id="4" creationId="{00000000-0000-0000-0000-000000000000}"/>
-          </ac:spMkLst>
-        </pc:spChg>
-      </pc:sldChg>
-      <pc:sldChg chg="modSp">
-        <pc:chgData name="Bryan Sun" userId="851caa7714272873" providerId="LiveId" clId="{1A8111D1-4A65-4A29-9DEE-6B0D34390FD8}" dt="2026-03-27T10:34:15.553" v="17" actId="20577"/>
-        <pc:sldMkLst>
-          <pc:docMk/>
-          <pc:sldMk cId="0" sldId="347"/>
-        </pc:sldMkLst>
-        <pc:spChg chg="mod">
-          <ac:chgData name="Bryan Sun" userId="851caa7714272873" providerId="LiveId" clId="{1A8111D1-4A65-4A29-9DEE-6B0D34390FD8}" dt="2026-03-27T10:34:15.553" v="17" actId="20577"/>
-          <ac:spMkLst>
-            <pc:docMk/>
-            <pc:sldMk cId="0" sldId="347"/>
-            <ac:spMk id="3" creationId="{00000000-0000-0000-0000-000000000000}"/>
-          </ac:spMkLst>
-        </pc:spChg>
-        <pc:spChg chg="mod">
-          <ac:chgData name="Bryan Sun" userId="851caa7714272873" providerId="LiveId" clId="{1A8111D1-4A65-4A29-9DEE-6B0D34390FD8}" dt="2026-03-27T10:03:15.603" v="15" actId="20577"/>
-          <ac:spMkLst>
-            <pc:docMk/>
-            <pc:sldMk cId="0" sldId="347"/>
-            <ac:spMk id="5" creationId="{00000000-0000-0000-0000-000000000000}"/>
-          </ac:spMkLst>
-        </pc:spChg>
-        <pc:spChg chg="mod">
-          <ac:chgData name="Bryan Sun" userId="851caa7714272873" providerId="LiveId" clId="{1A8111D1-4A65-4A29-9DEE-6B0D34390FD8}" dt="2026-03-27T10:16:55.834" v="16" actId="403"/>
-          <ac:spMkLst>
-            <pc:docMk/>
-            <pc:sldMk cId="0" sldId="347"/>
-            <ac:spMk id="8" creationId="{00000000-0000-0000-0000-000000000000}"/>
-          </ac:spMkLst>
-        </pc:spChg>
-      </pc:sldChg>
-    </pc:docChg>
-  </pc:docChgLst>
-  <pc:docChgLst>
-    <pc:chgData name="Bryan Sun" userId="851caa7714272873" providerId="LiveId" clId="{1DF0C224-3A3E-55A6-A8D1-F8F2208D385B}"/>
-    <pc:docChg chg="undo redo custSel modSld sldOrd">
-      <pc:chgData name="Bryan Sun" userId="851caa7714272873" providerId="LiveId" clId="{1DF0C224-3A3E-55A6-A8D1-F8F2208D385B}" dt="2026-04-04T11:52:22.128" v="2105" actId="313"/>
-      <pc:docMkLst>
-        <pc:docMk/>
-      </pc:docMkLst>
-      <pc:sldChg chg="modSp mod">
-        <pc:chgData name="Bryan Sun" userId="851caa7714272873" providerId="LiveId" clId="{1DF0C224-3A3E-55A6-A8D1-F8F2208D385B}" dt="2026-04-02T10:21:42.829" v="2089" actId="313"/>
-        <pc:sldMkLst>
-          <pc:docMk/>
-          <pc:sldMk cId="0" sldId="256"/>
-        </pc:sldMkLst>
-        <pc:spChg chg="mod">
-          <ac:chgData name="Bryan Sun" userId="851caa7714272873" providerId="LiveId" clId="{1DF0C224-3A3E-55A6-A8D1-F8F2208D385B}" dt="2026-04-02T10:21:34.150" v="2088" actId="313"/>
-          <ac:spMkLst>
-            <pc:docMk/>
-            <pc:sldMk cId="0" sldId="256"/>
-            <ac:spMk id="2" creationId="{00000000-0000-0000-0000-000000000000}"/>
-          </ac:spMkLst>
-        </pc:spChg>
-        <pc:spChg chg="mod">
-          <ac:chgData name="Bryan Sun" userId="851caa7714272873" providerId="LiveId" clId="{1DF0C224-3A3E-55A6-A8D1-F8F2208D385B}" dt="2026-04-02T10:21:42.829" v="2089" actId="313"/>
-          <ac:spMkLst>
-            <pc:docMk/>
-            <pc:sldMk cId="0" sldId="256"/>
-            <ac:spMk id="4" creationId="{00000000-0000-0000-0000-000000000000}"/>
-          </ac:spMkLst>
-        </pc:spChg>
-      </pc:sldChg>
-      <pc:sldChg chg="modSp mod">
-        <pc:chgData name="Bryan Sun" userId="851caa7714272873" providerId="LiveId" clId="{1DF0C224-3A3E-55A6-A8D1-F8F2208D385B}" dt="2026-04-02T10:22:03.503" v="2090" actId="20577"/>
-        <pc:sldMkLst>
-          <pc:docMk/>
-          <pc:sldMk cId="0" sldId="261"/>
-        </pc:sldMkLst>
-        <pc:spChg chg="mod">
-          <ac:chgData name="Bryan Sun" userId="851caa7714272873" providerId="LiveId" clId="{1DF0C224-3A3E-55A6-A8D1-F8F2208D385B}" dt="2026-04-02T10:22:03.503" v="2090" actId="20577"/>
-          <ac:spMkLst>
-            <pc:docMk/>
-            <pc:sldMk cId="0" sldId="261"/>
-            <ac:spMk id="4" creationId="{00000000-0000-0000-0000-000000000000}"/>
-          </ac:spMkLst>
-        </pc:spChg>
-      </pc:sldChg>
-      <pc:sldChg chg="addSp modSp mod">
-        <pc:chgData name="Bryan Sun" userId="851caa7714272873" providerId="LiveId" clId="{1DF0C224-3A3E-55A6-A8D1-F8F2208D385B}" dt="2026-03-25T23:53:50.770" v="703" actId="14100"/>
-        <pc:sldMkLst>
-          <pc:docMk/>
-          <pc:sldMk cId="0" sldId="332"/>
-        </pc:sldMkLst>
-        <pc:spChg chg="mod">
-          <ac:chgData name="Bryan Sun" userId="851caa7714272873" providerId="LiveId" clId="{1DF0C224-3A3E-55A6-A8D1-F8F2208D385B}" dt="2026-03-25T11:15:40.874" v="281" actId="20577"/>
-          <ac:spMkLst>
-            <pc:docMk/>
-            <pc:sldMk cId="0" sldId="332"/>
-            <ac:spMk id="2" creationId="{00000000-0000-0000-0000-000000000000}"/>
-          </ac:spMkLst>
-        </pc:spChg>
-        <pc:spChg chg="add mod">
-          <ac:chgData name="Bryan Sun" userId="851caa7714272873" providerId="LiveId" clId="{1DF0C224-3A3E-55A6-A8D1-F8F2208D385B}" dt="2026-03-25T23:50:30.991" v="504" actId="1076"/>
-          <ac:spMkLst>
-            <pc:docMk/>
-            <pc:sldMk cId="0" sldId="332"/>
-            <ac:spMk id="4" creationId="{1D60E5D6-3CB7-9EF8-3EBE-04F559AA9022}"/>
-          </ac:spMkLst>
-        </pc:spChg>
-        <pc:spChg chg="add mod">
-          <ac:chgData name="Bryan Sun" userId="851caa7714272873" providerId="LiveId" clId="{1DF0C224-3A3E-55A6-A8D1-F8F2208D385B}" dt="2026-03-25T23:51:30.481" v="577" actId="1035"/>
-          <ac:spMkLst>
-            <pc:docMk/>
-            <pc:sldMk cId="0" sldId="332"/>
-            <ac:spMk id="5" creationId="{C0383037-B709-5ED0-439C-CB557BE48466}"/>
-          </ac:spMkLst>
-        </pc:spChg>
-        <pc:spChg chg="add mod">
-          <ac:chgData name="Bryan Sun" userId="851caa7714272873" providerId="LiveId" clId="{1DF0C224-3A3E-55A6-A8D1-F8F2208D385B}" dt="2026-03-25T23:51:59.943" v="637" actId="20577"/>
-          <ac:spMkLst>
-            <pc:docMk/>
-            <pc:sldMk cId="0" sldId="332"/>
-            <ac:spMk id="6" creationId="{BA202337-BB9B-49F5-DC10-15BDD5970389}"/>
-          </ac:spMkLst>
-        </pc:spChg>
-        <pc:spChg chg="add mod">
-          <ac:chgData name="Bryan Sun" userId="851caa7714272873" providerId="LiveId" clId="{1DF0C224-3A3E-55A6-A8D1-F8F2208D385B}" dt="2026-03-25T23:53:04.587" v="668" actId="14100"/>
-          <ac:spMkLst>
-            <pc:docMk/>
-            <pc:sldMk cId="0" sldId="332"/>
-            <ac:spMk id="7" creationId="{59F8FD62-4F15-D766-A5A6-4DC9951693A2}"/>
-          </ac:spMkLst>
-        </pc:spChg>
-        <pc:spChg chg="add mod">
-          <ac:chgData name="Bryan Sun" userId="851caa7714272873" providerId="LiveId" clId="{1DF0C224-3A3E-55A6-A8D1-F8F2208D385B}" dt="2026-03-25T23:53:25.493" v="673" actId="20577"/>
-          <ac:spMkLst>
-            <pc:docMk/>
-            <pc:sldMk cId="0" sldId="332"/>
-            <ac:spMk id="8" creationId="{94E6E4F6-EF09-37B5-51B9-49EE5BF82CBB}"/>
-          </ac:spMkLst>
-        </pc:spChg>
-        <pc:spChg chg="add mod">
-          <ac:chgData name="Bryan Sun" userId="851caa7714272873" providerId="LiveId" clId="{1DF0C224-3A3E-55A6-A8D1-F8F2208D385B}" dt="2026-03-25T23:53:50.770" v="703" actId="14100"/>
-          <ac:spMkLst>
-            <pc:docMk/>
-            <pc:sldMk cId="0" sldId="332"/>
-            <ac:spMk id="9" creationId="{DAF96E3D-4D7E-5E7C-D73B-0D0BB7C8B4CC}"/>
-          </ac:spMkLst>
-        </pc:spChg>
-        <pc:picChg chg="add mod">
-          <ac:chgData name="Bryan Sun" userId="851caa7714272873" providerId="LiveId" clId="{1DF0C224-3A3E-55A6-A8D1-F8F2208D385B}" dt="2026-03-25T11:07:18.021" v="136"/>
-          <ac:picMkLst>
-            <pc:docMk/>
-            <pc:sldMk cId="0" sldId="332"/>
-            <ac:picMk id="3" creationId="{2C376B32-212C-DD77-53E8-60C4DC3372AE}"/>
-          </ac:picMkLst>
-        </pc:picChg>
-      </pc:sldChg>
-      <pc:sldChg chg="modSp mod modAnim">
-        <pc:chgData name="Bryan Sun" userId="851caa7714272873" providerId="LiveId" clId="{1DF0C224-3A3E-55A6-A8D1-F8F2208D385B}" dt="2026-03-26T00:23:05.339" v="950"/>
-        <pc:sldMkLst>
-          <pc:docMk/>
-          <pc:sldMk cId="0" sldId="343"/>
-        </pc:sldMkLst>
-        <pc:spChg chg="mod">
-          <ac:chgData name="Bryan Sun" userId="851caa7714272873" providerId="LiveId" clId="{1DF0C224-3A3E-55A6-A8D1-F8F2208D385B}" dt="2026-03-26T00:01:36.486" v="874" actId="14100"/>
-          <ac:spMkLst>
-            <pc:docMk/>
-            <pc:sldMk cId="0" sldId="343"/>
-            <ac:spMk id="8" creationId="{00000000-0000-0000-0000-000000000000}"/>
-          </ac:spMkLst>
-        </pc:spChg>
-        <pc:spChg chg="mod">
-          <ac:chgData name="Bryan Sun" userId="851caa7714272873" providerId="LiveId" clId="{1DF0C224-3A3E-55A6-A8D1-F8F2208D385B}" dt="2026-03-26T00:01:46.942" v="876" actId="1076"/>
-          <ac:spMkLst>
-            <pc:docMk/>
-            <pc:sldMk cId="0" sldId="343"/>
-            <ac:spMk id="9" creationId="{00000000-0000-0000-0000-000000000000}"/>
-          </ac:spMkLst>
-        </pc:spChg>
-        <pc:spChg chg="mod">
-          <ac:chgData name="Bryan Sun" userId="851caa7714272873" providerId="LiveId" clId="{1DF0C224-3A3E-55A6-A8D1-F8F2208D385B}" dt="2026-03-26T00:02:13.456" v="879" actId="1076"/>
-          <ac:spMkLst>
-            <pc:docMk/>
-            <pc:sldMk cId="0" sldId="343"/>
-            <ac:spMk id="10" creationId="{00000000-0000-0000-0000-000000000000}"/>
-          </ac:spMkLst>
-        </pc:spChg>
-        <pc:spChg chg="mod">
-          <ac:chgData name="Bryan Sun" userId="851caa7714272873" providerId="LiveId" clId="{1DF0C224-3A3E-55A6-A8D1-F8F2208D385B}" dt="2026-03-25T11:15:07.038" v="206" actId="20577"/>
-          <ac:spMkLst>
-            <pc:docMk/>
-            <pc:sldMk cId="0" sldId="343"/>
-            <ac:spMk id="11" creationId="{00000000-0000-0000-0000-000000000000}"/>
-          </ac:spMkLst>
-        </pc:spChg>
-        <pc:graphicFrameChg chg="mod modGraphic">
-          <ac:chgData name="Bryan Sun" userId="851caa7714272873" providerId="LiveId" clId="{1DF0C224-3A3E-55A6-A8D1-F8F2208D385B}" dt="2026-03-26T00:01:42.437" v="875" actId="1076"/>
-          <ac:graphicFrameMkLst>
-            <pc:docMk/>
-            <pc:sldMk cId="0" sldId="343"/>
-            <ac:graphicFrameMk id="2" creationId="{00000000-0000-0000-0000-000000000000}"/>
-          </ac:graphicFrameMkLst>
-        </pc:graphicFrameChg>
-        <pc:graphicFrameChg chg="mod modGraphic">
-          <ac:chgData name="Bryan Sun" userId="851caa7714272873" providerId="LiveId" clId="{1DF0C224-3A3E-55A6-A8D1-F8F2208D385B}" dt="2026-03-26T00:01:52.419" v="877" actId="1076"/>
-          <ac:graphicFrameMkLst>
-            <pc:docMk/>
-            <pc:sldMk cId="0" sldId="343"/>
-            <ac:graphicFrameMk id="12" creationId="{00000000-0000-0000-0000-000000000000}"/>
-          </ac:graphicFrameMkLst>
-        </pc:graphicFrameChg>
-        <pc:graphicFrameChg chg="mod modGraphic">
-          <ac:chgData name="Bryan Sun" userId="851caa7714272873" providerId="LiveId" clId="{1DF0C224-3A3E-55A6-A8D1-F8F2208D385B}" dt="2026-03-26T00:02:26.117" v="882" actId="14100"/>
-          <ac:graphicFrameMkLst>
-            <pc:docMk/>
-            <pc:sldMk cId="0" sldId="343"/>
-            <ac:graphicFrameMk id="13" creationId="{00000000-0000-0000-0000-000000000000}"/>
-          </ac:graphicFrameMkLst>
-        </pc:graphicFrameChg>
-      </pc:sldChg>
-      <pc:sldChg chg="modSp mod">
-        <pc:chgData name="Bryan Sun" userId="851caa7714272873" providerId="LiveId" clId="{1DF0C224-3A3E-55A6-A8D1-F8F2208D385B}" dt="2026-03-26T00:49:13.600" v="1196" actId="14100"/>
-        <pc:sldMkLst>
-          <pc:docMk/>
-          <pc:sldMk cId="0" sldId="345"/>
-        </pc:sldMkLst>
-        <pc:spChg chg="mod">
-          <ac:chgData name="Bryan Sun" userId="851caa7714272873" providerId="LiveId" clId="{1DF0C224-3A3E-55A6-A8D1-F8F2208D385B}" dt="2026-03-26T00:49:13.600" v="1196" actId="14100"/>
-          <ac:spMkLst>
-            <pc:docMk/>
-            <pc:sldMk cId="0" sldId="345"/>
-            <ac:spMk id="3" creationId="{00000000-0000-0000-0000-000000000000}"/>
-          </ac:spMkLst>
-        </pc:spChg>
-        <pc:spChg chg="mod">
-          <ac:chgData name="Bryan Sun" userId="851caa7714272873" providerId="LiveId" clId="{1DF0C224-3A3E-55A6-A8D1-F8F2208D385B}" dt="2026-03-25T11:12:40.889" v="178" actId="20577"/>
-          <ac:spMkLst>
-            <pc:docMk/>
-            <pc:sldMk cId="0" sldId="345"/>
-            <ac:spMk id="4" creationId="{00000000-0000-0000-0000-000000000000}"/>
-          </ac:spMkLst>
-        </pc:spChg>
-        <pc:spChg chg="mod">
-          <ac:chgData name="Bryan Sun" userId="851caa7714272873" providerId="LiveId" clId="{1DF0C224-3A3E-55A6-A8D1-F8F2208D385B}" dt="2026-03-26T00:49:03.488" v="1194" actId="27636"/>
-          <ac:spMkLst>
-            <pc:docMk/>
-            <pc:sldMk cId="0" sldId="345"/>
-            <ac:spMk id="6" creationId="{00000000-0000-0000-0000-000000000000}"/>
-          </ac:spMkLst>
-        </pc:spChg>
-        <pc:spChg chg="mod">
-          <ac:chgData name="Bryan Sun" userId="851caa7714272873" providerId="LiveId" clId="{1DF0C224-3A3E-55A6-A8D1-F8F2208D385B}" dt="2026-03-26T00:49:00.346" v="1192" actId="14100"/>
-          <ac:spMkLst>
-            <pc:docMk/>
-            <pc:sldMk cId="0" sldId="345"/>
-            <ac:spMk id="7" creationId="{00000000-0000-0000-0000-000000000000}"/>
-          </ac:spMkLst>
-        </pc:spChg>
-      </pc:sldChg>
-      <pc:sldChg chg="modSp mod">
-        <pc:chgData name="Bryan Sun" userId="851caa7714272873" providerId="LiveId" clId="{1DF0C224-3A3E-55A6-A8D1-F8F2208D385B}" dt="2026-03-26T00:49:56.633" v="1201" actId="14100"/>
-        <pc:sldMkLst>
-          <pc:docMk/>
-          <pc:sldMk cId="0" sldId="346"/>
-        </pc:sldMkLst>
-        <pc:spChg chg="mod">
-          <ac:chgData name="Bryan Sun" userId="851caa7714272873" providerId="LiveId" clId="{1DF0C224-3A3E-55A6-A8D1-F8F2208D385B}" dt="2026-03-26T00:49:56.633" v="1201" actId="14100"/>
-          <ac:spMkLst>
-            <pc:docMk/>
-            <pc:sldMk cId="0" sldId="346"/>
-            <ac:spMk id="3" creationId="{00000000-0000-0000-0000-000000000000}"/>
-          </ac:spMkLst>
-        </pc:spChg>
-        <pc:spChg chg="mod">
-          <ac:chgData name="Bryan Sun" userId="851caa7714272873" providerId="LiveId" clId="{1DF0C224-3A3E-55A6-A8D1-F8F2208D385B}" dt="2026-03-26T00:49:31.240" v="1199" actId="2711"/>
-          <ac:spMkLst>
-            <pc:docMk/>
-            <pc:sldMk cId="0" sldId="346"/>
-            <ac:spMk id="4" creationId="{00000000-0000-0000-0000-000000000000}"/>
-          </ac:spMkLst>
-        </pc:spChg>
-      </pc:sldChg>
-      <pc:sldChg chg="modSp mod modAnim">
-        <pc:chgData name="Bryan Sun" userId="851caa7714272873" providerId="LiveId" clId="{1DF0C224-3A3E-55A6-A8D1-F8F2208D385B}" dt="2026-03-26T00:22:34.346" v="948"/>
-        <pc:sldMkLst>
-          <pc:docMk/>
-          <pc:sldMk cId="0" sldId="347"/>
-        </pc:sldMkLst>
-        <pc:spChg chg="mod">
-          <ac:chgData name="Bryan Sun" userId="851caa7714272873" providerId="LiveId" clId="{1DF0C224-3A3E-55A6-A8D1-F8F2208D385B}" dt="2026-03-25T10:59:45.309" v="32" actId="14100"/>
-          <ac:spMkLst>
-            <pc:docMk/>
-            <pc:sldMk cId="0" sldId="347"/>
-            <ac:spMk id="3" creationId="{00000000-0000-0000-0000-000000000000}"/>
-          </ac:spMkLst>
-        </pc:spChg>
-        <pc:spChg chg="mod">
-          <ac:chgData name="Bryan Sun" userId="851caa7714272873" providerId="LiveId" clId="{1DF0C224-3A3E-55A6-A8D1-F8F2208D385B}" dt="2026-03-25T11:05:39.082" v="129" actId="20577"/>
-          <ac:spMkLst>
-            <pc:docMk/>
-            <pc:sldMk cId="0" sldId="347"/>
-            <ac:spMk id="5" creationId="{00000000-0000-0000-0000-000000000000}"/>
-          </ac:spMkLst>
-        </pc:spChg>
-        <pc:spChg chg="mod">
-          <ac:chgData name="Bryan Sun" userId="851caa7714272873" providerId="LiveId" clId="{1DF0C224-3A3E-55A6-A8D1-F8F2208D385B}" dt="2026-03-25T11:15:58.938" v="284" actId="20577"/>
-          <ac:spMkLst>
-            <pc:docMk/>
-            <pc:sldMk cId="0" sldId="347"/>
-            <ac:spMk id="7" creationId="{00000000-0000-0000-0000-000000000000}"/>
-          </ac:spMkLst>
-        </pc:spChg>
-        <pc:spChg chg="mod">
-          <ac:chgData name="Bryan Sun" userId="851caa7714272873" providerId="LiveId" clId="{1DF0C224-3A3E-55A6-A8D1-F8F2208D385B}" dt="2026-03-25T11:05:47.999" v="130" actId="2711"/>
-          <ac:spMkLst>
-            <pc:docMk/>
-            <pc:sldMk cId="0" sldId="347"/>
-            <ac:spMk id="8" creationId="{00000000-0000-0000-0000-000000000000}"/>
-          </ac:spMkLst>
-        </pc:spChg>
-      </pc:sldChg>
-      <pc:sldChg chg="modSp mod">
-        <pc:chgData name="Bryan Sun" userId="851caa7714272873" providerId="LiveId" clId="{1DF0C224-3A3E-55A6-A8D1-F8F2208D385B}" dt="2026-03-25T11:14:40.739" v="199" actId="20577"/>
-        <pc:sldMkLst>
-          <pc:docMk/>
-          <pc:sldMk cId="0" sldId="348"/>
-        </pc:sldMkLst>
-        <pc:spChg chg="mod">
-          <ac:chgData name="Bryan Sun" userId="851caa7714272873" providerId="LiveId" clId="{1DF0C224-3A3E-55A6-A8D1-F8F2208D385B}" dt="2026-03-25T11:14:40.739" v="199" actId="20577"/>
-          <ac:spMkLst>
-            <pc:docMk/>
-            <pc:sldMk cId="0" sldId="348"/>
-            <ac:spMk id="6" creationId="{00000000-0000-0000-0000-000000000000}"/>
-          </ac:spMkLst>
-        </pc:spChg>
-      </pc:sldChg>
-      <pc:sldChg chg="modSp mod">
-        <pc:chgData name="Bryan Sun" userId="851caa7714272873" providerId="LiveId" clId="{1DF0C224-3A3E-55A6-A8D1-F8F2208D385B}" dt="2026-04-04T11:52:22.128" v="2105" actId="313"/>
-        <pc:sldMkLst>
-          <pc:docMk/>
-          <pc:sldMk cId="0" sldId="349"/>
-        </pc:sldMkLst>
-        <pc:spChg chg="mod">
-          <ac:chgData name="Bryan Sun" userId="851caa7714272873" providerId="LiveId" clId="{1DF0C224-3A3E-55A6-A8D1-F8F2208D385B}" dt="2026-04-04T11:52:22.128" v="2105" actId="313"/>
-          <ac:spMkLst>
-            <pc:docMk/>
-            <pc:sldMk cId="0" sldId="349"/>
-            <ac:spMk id="3" creationId="{00000000-0000-0000-0000-000000000000}"/>
-          </ac:spMkLst>
-        </pc:spChg>
-        <pc:spChg chg="mod">
-          <ac:chgData name="Bryan Sun" userId="851caa7714272873" providerId="LiveId" clId="{1DF0C224-3A3E-55A6-A8D1-F8F2208D385B}" dt="2026-03-25T10:59:20.344" v="29" actId="2711"/>
-          <ac:spMkLst>
-            <pc:docMk/>
-            <pc:sldMk cId="0" sldId="349"/>
-            <ac:spMk id="5" creationId="{00000000-0000-0000-0000-000000000000}"/>
-          </ac:spMkLst>
-        </pc:spChg>
-      </pc:sldChg>
-      <pc:sldChg chg="addSp delSp modSp mod modAnim">
-        <pc:chgData name="Bryan Sun" userId="851caa7714272873" providerId="LiveId" clId="{1DF0C224-3A3E-55A6-A8D1-F8F2208D385B}" dt="2026-03-26T00:23:47.531" v="951"/>
-        <pc:sldMkLst>
-          <pc:docMk/>
-          <pc:sldMk cId="0" sldId="353"/>
-        </pc:sldMkLst>
-        <pc:spChg chg="mod">
-          <ac:chgData name="Bryan Sun" userId="851caa7714272873" providerId="LiveId" clId="{1DF0C224-3A3E-55A6-A8D1-F8F2208D385B}" dt="2026-03-26T00:15:49.084" v="920" actId="20577"/>
-          <ac:spMkLst>
-            <pc:docMk/>
-            <pc:sldMk cId="0" sldId="353"/>
-            <ac:spMk id="4" creationId="{00000000-0000-0000-0000-000000000000}"/>
-          </ac:spMkLst>
-        </pc:spChg>
-        <pc:spChg chg="mod">
-          <ac:chgData name="Bryan Sun" userId="851caa7714272873" providerId="LiveId" clId="{1DF0C224-3A3E-55A6-A8D1-F8F2208D385B}" dt="2026-03-25T11:15:01.039" v="203" actId="20577"/>
-          <ac:spMkLst>
-            <pc:docMk/>
-            <pc:sldMk cId="0" sldId="353"/>
-            <ac:spMk id="7" creationId="{00000000-0000-0000-0000-000000000000}"/>
-          </ac:spMkLst>
-        </pc:spChg>
-        <pc:spChg chg="mod">
-          <ac:chgData name="Bryan Sun" userId="851caa7714272873" providerId="LiveId" clId="{1DF0C224-3A3E-55A6-A8D1-F8F2208D385B}" dt="2026-03-25T11:09:27.557" v="150" actId="2711"/>
-          <ac:spMkLst>
-            <pc:docMk/>
-            <pc:sldMk cId="0" sldId="353"/>
-            <ac:spMk id="10" creationId="{00000000-0000-0000-0000-000000000000}"/>
-          </ac:spMkLst>
-        </pc:spChg>
-        <pc:spChg chg="mod">
-          <ac:chgData name="Bryan Sun" userId="851caa7714272873" providerId="LiveId" clId="{1DF0C224-3A3E-55A6-A8D1-F8F2208D385B}" dt="2026-03-25T11:09:57.923" v="155" actId="2711"/>
-          <ac:spMkLst>
-            <pc:docMk/>
-            <pc:sldMk cId="0" sldId="353"/>
-            <ac:spMk id="11" creationId="{00000000-0000-0000-0000-000000000000}"/>
-          </ac:spMkLst>
-        </pc:spChg>
-        <pc:spChg chg="mod">
-          <ac:chgData name="Bryan Sun" userId="851caa7714272873" providerId="LiveId" clId="{1DF0C224-3A3E-55A6-A8D1-F8F2208D385B}" dt="2026-03-25T11:09:52.388" v="154" actId="2711"/>
-          <ac:spMkLst>
-            <pc:docMk/>
-            <pc:sldMk cId="0" sldId="353"/>
-            <ac:spMk id="12" creationId="{00000000-0000-0000-0000-000000000000}"/>
-          </ac:spMkLst>
-        </pc:spChg>
-        <pc:spChg chg="mod">
-          <ac:chgData name="Bryan Sun" userId="851caa7714272873" providerId="LiveId" clId="{1DF0C224-3A3E-55A6-A8D1-F8F2208D385B}" dt="2026-03-25T11:09:27.557" v="150" actId="2711"/>
-          <ac:spMkLst>
-            <pc:docMk/>
-            <pc:sldMk cId="0" sldId="353"/>
-            <ac:spMk id="13" creationId="{00000000-0000-0000-0000-000000000000}"/>
-          </ac:spMkLst>
-        </pc:spChg>
-        <pc:spChg chg="mod">
-          <ac:chgData name="Bryan Sun" userId="851caa7714272873" providerId="LiveId" clId="{1DF0C224-3A3E-55A6-A8D1-F8F2208D385B}" dt="2026-03-25T11:09:27.557" v="150" actId="2711"/>
-          <ac:spMkLst>
-            <pc:docMk/>
-            <pc:sldMk cId="0" sldId="353"/>
-            <ac:spMk id="15" creationId="{00000000-0000-0000-0000-000000000000}"/>
-          </ac:spMkLst>
-        </pc:spChg>
-        <pc:picChg chg="add mod">
-          <ac:chgData name="Bryan Sun" userId="851caa7714272873" providerId="LiveId" clId="{1DF0C224-3A3E-55A6-A8D1-F8F2208D385B}" dt="2026-03-26T00:15:36.499" v="911" actId="1076"/>
-          <ac:picMkLst>
-            <pc:docMk/>
-            <pc:sldMk cId="0" sldId="353"/>
-            <ac:picMk id="5" creationId="{872B9F14-060F-A43A-14C1-2BE39178C2F8}"/>
-          </ac:picMkLst>
-        </pc:picChg>
-        <pc:picChg chg="add mod">
-          <ac:chgData name="Bryan Sun" userId="851caa7714272873" providerId="LiveId" clId="{1DF0C224-3A3E-55A6-A8D1-F8F2208D385B}" dt="2026-03-26T00:16:51.635" v="923" actId="1076"/>
-          <ac:picMkLst>
-            <pc:docMk/>
-            <pc:sldMk cId="0" sldId="353"/>
-            <ac:picMk id="6" creationId="{59A401F8-AF34-7214-5D48-1FAE3EFE83E5}"/>
-          </ac:picMkLst>
-        </pc:picChg>
-        <pc:picChg chg="add mod">
-          <ac:chgData name="Bryan Sun" userId="851caa7714272873" providerId="LiveId" clId="{1DF0C224-3A3E-55A6-A8D1-F8F2208D385B}" dt="2026-03-26T00:17:40.838" v="926" actId="1076"/>
-          <ac:picMkLst>
-            <pc:docMk/>
-            <pc:sldMk cId="0" sldId="353"/>
-            <ac:picMk id="8" creationId="{1AF1AFE9-4E23-DBFF-8F17-060F52526864}"/>
-          </ac:picMkLst>
-        </pc:picChg>
-      </pc:sldChg>
-      <pc:sldChg chg="modSp mod">
-        <pc:chgData name="Bryan Sun" userId="851caa7714272873" providerId="LiveId" clId="{1DF0C224-3A3E-55A6-A8D1-F8F2208D385B}" dt="2026-03-26T00:24:25.781" v="953" actId="20577"/>
-        <pc:sldMkLst>
-          <pc:docMk/>
-          <pc:sldMk cId="0" sldId="354"/>
-        </pc:sldMkLst>
-        <pc:spChg chg="mod">
-          <ac:chgData name="Bryan Sun" userId="851caa7714272873" providerId="LiveId" clId="{1DF0C224-3A3E-55A6-A8D1-F8F2208D385B}" dt="2026-03-26T00:24:25.781" v="953" actId="20577"/>
-          <ac:spMkLst>
-            <pc:docMk/>
-            <pc:sldMk cId="0" sldId="354"/>
-            <ac:spMk id="5" creationId="{00000000-0000-0000-0000-000000000000}"/>
-          </ac:spMkLst>
-        </pc:spChg>
-        <pc:spChg chg="mod">
-          <ac:chgData name="Bryan Sun" userId="851caa7714272873" providerId="LiveId" clId="{1DF0C224-3A3E-55A6-A8D1-F8F2208D385B}" dt="2026-03-25T11:14:57.338" v="202" actId="20577"/>
-          <ac:spMkLst>
-            <pc:docMk/>
-            <pc:sldMk cId="0" sldId="354"/>
-            <ac:spMk id="7" creationId="{00000000-0000-0000-0000-000000000000}"/>
-          </ac:spMkLst>
-        </pc:spChg>
-      </pc:sldChg>
-      <pc:sldChg chg="addSp delSp modSp mod modAnim">
-        <pc:chgData name="Bryan Sun" userId="851caa7714272873" providerId="LiveId" clId="{1DF0C224-3A3E-55A6-A8D1-F8F2208D385B}" dt="2026-03-26T00:52:13.776" v="1210" actId="20577"/>
-        <pc:sldMkLst>
-          <pc:docMk/>
-          <pc:sldMk cId="0" sldId="357"/>
-        </pc:sldMkLst>
-        <pc:spChg chg="mod">
-          <ac:chgData name="Bryan Sun" userId="851caa7714272873" providerId="LiveId" clId="{1DF0C224-3A3E-55A6-A8D1-F8F2208D385B}" dt="2026-03-26T00:52:05.679" v="1209" actId="20577"/>
-          <ac:spMkLst>
-            <pc:docMk/>
-            <pc:sldMk cId="0" sldId="357"/>
-            <ac:spMk id="4" creationId="{00000000-0000-0000-0000-000000000000}"/>
-          </ac:spMkLst>
-        </pc:spChg>
-        <pc:spChg chg="mod">
-          <ac:chgData name="Bryan Sun" userId="851caa7714272873" providerId="LiveId" clId="{1DF0C224-3A3E-55A6-A8D1-F8F2208D385B}" dt="2026-03-25T11:14:54.212" v="201" actId="20577"/>
-          <ac:spMkLst>
-            <pc:docMk/>
-            <pc:sldMk cId="0" sldId="357"/>
-            <ac:spMk id="7" creationId="{00000000-0000-0000-0000-000000000000}"/>
-          </ac:spMkLst>
-        </pc:spChg>
-        <pc:spChg chg="mod">
-          <ac:chgData name="Bryan Sun" userId="851caa7714272873" providerId="LiveId" clId="{1DF0C224-3A3E-55A6-A8D1-F8F2208D385B}" dt="2026-03-25T11:11:33.029" v="163" actId="2711"/>
-          <ac:spMkLst>
-            <pc:docMk/>
-            <pc:sldMk cId="0" sldId="357"/>
-            <ac:spMk id="10" creationId="{00000000-0000-0000-0000-000000000000}"/>
-          </ac:spMkLst>
-        </pc:spChg>
-        <pc:spChg chg="mod">
-          <ac:chgData name="Bryan Sun" userId="851caa7714272873" providerId="LiveId" clId="{1DF0C224-3A3E-55A6-A8D1-F8F2208D385B}" dt="2026-03-25T11:11:33.029" v="163" actId="2711"/>
-          <ac:spMkLst>
-            <pc:docMk/>
-            <pc:sldMk cId="0" sldId="357"/>
-            <ac:spMk id="11" creationId="{00000000-0000-0000-0000-000000000000}"/>
-          </ac:spMkLst>
-        </pc:spChg>
-        <pc:spChg chg="mod">
-          <ac:chgData name="Bryan Sun" userId="851caa7714272873" providerId="LiveId" clId="{1DF0C224-3A3E-55A6-A8D1-F8F2208D385B}" dt="2026-03-25T11:11:33.029" v="163" actId="2711"/>
-          <ac:spMkLst>
-            <pc:docMk/>
-            <pc:sldMk cId="0" sldId="357"/>
-            <ac:spMk id="15" creationId="{00000000-0000-0000-0000-000000000000}"/>
-          </ac:spMkLst>
-        </pc:spChg>
-        <pc:spChg chg="mod">
-          <ac:chgData name="Bryan Sun" userId="851caa7714272873" providerId="LiveId" clId="{1DF0C224-3A3E-55A6-A8D1-F8F2208D385B}" dt="2026-03-26T00:52:13.776" v="1210" actId="20577"/>
-          <ac:spMkLst>
-            <pc:docMk/>
-            <pc:sldMk cId="0" sldId="357"/>
-            <ac:spMk id="16" creationId="{00000000-0000-0000-0000-000000000000}"/>
-          </ac:spMkLst>
-        </pc:spChg>
-        <pc:picChg chg="add mod">
-          <ac:chgData name="Bryan Sun" userId="851caa7714272873" providerId="LiveId" clId="{1DF0C224-3A3E-55A6-A8D1-F8F2208D385B}" dt="2026-03-26T00:28:58.532" v="956" actId="1076"/>
-          <ac:picMkLst>
-            <pc:docMk/>
-            <pc:sldMk cId="0" sldId="357"/>
-            <ac:picMk id="2" creationId="{82754B86-570D-6F44-610F-937EE1333CE8}"/>
-          </ac:picMkLst>
-        </pc:picChg>
-        <pc:picChg chg="add mod">
-          <ac:chgData name="Bryan Sun" userId="851caa7714272873" providerId="LiveId" clId="{1DF0C224-3A3E-55A6-A8D1-F8F2208D385B}" dt="2026-03-26T00:32:32.191" v="1005" actId="1076"/>
-          <ac:picMkLst>
-            <pc:docMk/>
-            <pc:sldMk cId="0" sldId="357"/>
-            <ac:picMk id="6" creationId="{27A6E315-95F3-C852-E078-BA78D1212CAC}"/>
-          </ac:picMkLst>
-        </pc:picChg>
-      </pc:sldChg>
-      <pc:sldChg chg="addSp modSp mod ord">
-        <pc:chgData name="Bryan Sun" userId="851caa7714272873" providerId="LiveId" clId="{1DF0C224-3A3E-55A6-A8D1-F8F2208D385B}" dt="2026-03-26T01:01:15.907" v="1716" actId="14100"/>
-        <pc:sldMkLst>
-          <pc:docMk/>
-          <pc:sldMk cId="0" sldId="358"/>
-        </pc:sldMkLst>
-        <pc:spChg chg="add mod">
-          <ac:chgData name="Bryan Sun" userId="851caa7714272873" providerId="LiveId" clId="{1DF0C224-3A3E-55A6-A8D1-F8F2208D385B}" dt="2026-03-26T01:01:05.775" v="1715" actId="14100"/>
-          <ac:spMkLst>
-            <pc:docMk/>
-            <pc:sldMk cId="0" sldId="358"/>
-            <ac:spMk id="2" creationId="{ABC34BFD-A298-5A74-211B-3825805E8C5B}"/>
-          </ac:spMkLst>
-        </pc:spChg>
-        <pc:spChg chg="mod">
-          <ac:chgData name="Bryan Sun" userId="851caa7714272873" providerId="LiveId" clId="{1DF0C224-3A3E-55A6-A8D1-F8F2208D385B}" dt="2026-03-26T00:55:16.703" v="1253" actId="2711"/>
-          <ac:spMkLst>
-            <pc:docMk/>
-            <pc:sldMk cId="0" sldId="358"/>
-            <ac:spMk id="5" creationId="{00000000-0000-0000-0000-000000000000}"/>
-          </ac:spMkLst>
-        </pc:spChg>
-        <pc:spChg chg="add mod">
-          <ac:chgData name="Bryan Sun" userId="851caa7714272873" providerId="LiveId" clId="{1DF0C224-3A3E-55A6-A8D1-F8F2208D385B}" dt="2026-03-26T01:01:15.907" v="1716" actId="14100"/>
-          <ac:spMkLst>
-            <pc:docMk/>
-            <pc:sldMk cId="0" sldId="358"/>
-            <ac:spMk id="6" creationId="{7F451C8C-B5C4-8545-9626-E6D4993B35AC}"/>
-          </ac:spMkLst>
-        </pc:spChg>
-        <pc:spChg chg="mod">
-          <ac:chgData name="Bryan Sun" userId="851caa7714272873" providerId="LiveId" clId="{1DF0C224-3A3E-55A6-A8D1-F8F2208D385B}" dt="2026-03-26T00:52:57.885" v="1214" actId="2711"/>
-          <ac:spMkLst>
-            <pc:docMk/>
-            <pc:sldMk cId="0" sldId="358"/>
-            <ac:spMk id="7" creationId="{00000000-0000-0000-0000-000000000000}"/>
-          </ac:spMkLst>
-        </pc:spChg>
-      </pc:sldChg>
-      <pc:sldChg chg="modSp mod ord">
-        <pc:chgData name="Bryan Sun" userId="851caa7714272873" providerId="LiveId" clId="{1DF0C224-3A3E-55A6-A8D1-F8F2208D385B}" dt="2026-03-26T01:02:14.624" v="1717" actId="2711"/>
-        <pc:sldMkLst>
-          <pc:docMk/>
-          <pc:sldMk cId="0" sldId="359"/>
-        </pc:sldMkLst>
-        <pc:spChg chg="mod">
-          <ac:chgData name="Bryan Sun" userId="851caa7714272873" providerId="LiveId" clId="{1DF0C224-3A3E-55A6-A8D1-F8F2208D385B}" dt="2026-03-26T01:02:14.624" v="1717" actId="2711"/>
-          <ac:spMkLst>
-            <pc:docMk/>
-            <pc:sldMk cId="0" sldId="359"/>
-            <ac:spMk id="7" creationId="{00000000-0000-0000-0000-000000000000}"/>
-          </ac:spMkLst>
-        </pc:spChg>
-        <pc:spChg chg="mod">
-          <ac:chgData name="Bryan Sun" userId="851caa7714272873" providerId="LiveId" clId="{1DF0C224-3A3E-55A6-A8D1-F8F2208D385B}" dt="2026-03-25T11:13:57.554" v="185" actId="2711"/>
-          <ac:spMkLst>
-            <pc:docMk/>
-            <pc:sldMk cId="0" sldId="359"/>
-            <ac:spMk id="11" creationId="{00000000-0000-0000-0000-000000000000}"/>
-          </ac:spMkLst>
-        </pc:spChg>
-        <pc:spChg chg="mod">
-          <ac:chgData name="Bryan Sun" userId="851caa7714272873" providerId="LiveId" clId="{1DF0C224-3A3E-55A6-A8D1-F8F2208D385B}" dt="2026-03-25T11:14:06.333" v="186" actId="2711"/>
-          <ac:spMkLst>
-            <pc:docMk/>
-            <pc:sldMk cId="0" sldId="359"/>
-            <ac:spMk id="18" creationId="{00000000-0000-0000-0000-000000000000}"/>
-          </ac:spMkLst>
-        </pc:spChg>
-      </pc:sldChg>
-      <pc:sldChg chg="addSp modSp mod">
-        <pc:chgData name="Bryan Sun" userId="851caa7714272873" providerId="LiveId" clId="{1DF0C224-3A3E-55A6-A8D1-F8F2208D385B}" dt="2026-03-26T01:07:39.700" v="2087" actId="2711"/>
-        <pc:sldMkLst>
-          <pc:docMk/>
-          <pc:sldMk cId="0" sldId="360"/>
-        </pc:sldMkLst>
-        <pc:spChg chg="mod">
-          <ac:chgData name="Bryan Sun" userId="851caa7714272873" providerId="LiveId" clId="{1DF0C224-3A3E-55A6-A8D1-F8F2208D385B}" dt="2026-03-25T11:16:23.323" v="285" actId="2711"/>
-          <ac:spMkLst>
-            <pc:docMk/>
-            <pc:sldMk cId="0" sldId="360"/>
-            <ac:spMk id="2" creationId="{00000000-0000-0000-0000-000000000000}"/>
-          </ac:spMkLst>
-        </pc:spChg>
-        <pc:spChg chg="add mod">
-          <ac:chgData name="Bryan Sun" userId="851caa7714272873" providerId="LiveId" clId="{1DF0C224-3A3E-55A6-A8D1-F8F2208D385B}" dt="2026-03-26T01:05:34.372" v="1874" actId="1035"/>
-          <ac:spMkLst>
-            <pc:docMk/>
-            <pc:sldMk cId="0" sldId="360"/>
-            <ac:spMk id="6" creationId="{31FBFA48-867E-AEFE-C0C3-2E48C5452B0D}"/>
-          </ac:spMkLst>
-        </pc:spChg>
-        <pc:spChg chg="add mod">
-          <ac:chgData name="Bryan Sun" userId="851caa7714272873" providerId="LiveId" clId="{1DF0C224-3A3E-55A6-A8D1-F8F2208D385B}" dt="2026-03-26T01:06:28.978" v="1982" actId="2711"/>
-          <ac:spMkLst>
-            <pc:docMk/>
-            <pc:sldMk cId="0" sldId="360"/>
-            <ac:spMk id="8" creationId="{9A0E06D3-5CA7-E398-5C83-F8DE9E2F919B}"/>
-          </ac:spMkLst>
-        </pc:spChg>
-        <pc:spChg chg="add mod">
-          <ac:chgData name="Bryan Sun" userId="851caa7714272873" providerId="LiveId" clId="{1DF0C224-3A3E-55A6-A8D1-F8F2208D385B}" dt="2026-03-26T01:07:03.657" v="2046" actId="1035"/>
-          <ac:spMkLst>
-            <pc:docMk/>
-            <pc:sldMk cId="0" sldId="360"/>
-            <ac:spMk id="9" creationId="{B9F4585C-D05E-F916-2527-E7FD35620107}"/>
-          </ac:spMkLst>
-        </pc:spChg>
-        <pc:spChg chg="add mod">
-          <ac:chgData name="Bryan Sun" userId="851caa7714272873" providerId="LiveId" clId="{1DF0C224-3A3E-55A6-A8D1-F8F2208D385B}" dt="2026-03-26T01:07:39.700" v="2087" actId="2711"/>
-          <ac:spMkLst>
-            <pc:docMk/>
-            <pc:sldMk cId="0" sldId="360"/>
-            <ac:spMk id="10" creationId="{C2B10EFC-7336-9AFE-C55C-2A34DD37D356}"/>
-          </ac:spMkLst>
-        </pc:spChg>
-      </pc:sldChg>
-      <pc:sldChg chg="addSp delSp modSp mod">
-        <pc:chgData name="Bryan Sun" userId="851caa7714272873" providerId="LiveId" clId="{1DF0C224-3A3E-55A6-A8D1-F8F2208D385B}" dt="2026-03-25T23:30:40.595" v="367" actId="478"/>
-        <pc:sldMkLst>
-          <pc:docMk/>
-          <pc:sldMk cId="0" sldId="361"/>
-        </pc:sldMkLst>
-        <pc:spChg chg="mod">
-          <ac:chgData name="Bryan Sun" userId="851caa7714272873" providerId="LiveId" clId="{1DF0C224-3A3E-55A6-A8D1-F8F2208D385B}" dt="2026-03-25T11:06:15.530" v="131" actId="2711"/>
-          <ac:spMkLst>
-            <pc:docMk/>
-            <pc:sldMk cId="0" sldId="361"/>
-            <ac:spMk id="3" creationId="{00000000-0000-0000-0000-000000000000}"/>
-          </ac:spMkLst>
-        </pc:spChg>
-        <pc:spChg chg="mod">
-          <ac:chgData name="Bryan Sun" userId="851caa7714272873" providerId="LiveId" clId="{1DF0C224-3A3E-55A6-A8D1-F8F2208D385B}" dt="2026-03-25T11:15:55.887" v="283" actId="20577"/>
-          <ac:spMkLst>
-            <pc:docMk/>
-            <pc:sldMk cId="0" sldId="361"/>
-            <ac:spMk id="5" creationId="{00000000-0000-0000-0000-000000000000}"/>
-          </ac:spMkLst>
-        </pc:spChg>
-        <pc:spChg chg="mod">
-          <ac:chgData name="Bryan Sun" userId="851caa7714272873" providerId="LiveId" clId="{1DF0C224-3A3E-55A6-A8D1-F8F2208D385B}" dt="2026-03-25T11:06:15.530" v="131" actId="2711"/>
-          <ac:spMkLst>
-            <pc:docMk/>
-            <pc:sldMk cId="0" sldId="361"/>
-            <ac:spMk id="7" creationId="{00000000-0000-0000-0000-000000000000}"/>
-          </ac:spMkLst>
-        </pc:spChg>
-        <pc:spChg chg="mod">
-          <ac:chgData name="Bryan Sun" userId="851caa7714272873" providerId="LiveId" clId="{1DF0C224-3A3E-55A6-A8D1-F8F2208D385B}" dt="2026-03-25T23:28:12.285" v="355" actId="1076"/>
-          <ac:spMkLst>
-            <pc:docMk/>
-            <pc:sldMk cId="0" sldId="361"/>
-            <ac:spMk id="8" creationId="{00000000-0000-0000-0000-000000000000}"/>
-          </ac:spMkLst>
-        </pc:spChg>
-        <pc:spChg chg="mod">
-          <ac:chgData name="Bryan Sun" userId="851caa7714272873" providerId="LiveId" clId="{1DF0C224-3A3E-55A6-A8D1-F8F2208D385B}" dt="2026-03-25T11:06:15.530" v="131" actId="2711"/>
-          <ac:spMkLst>
-            <pc:docMk/>
-            <pc:sldMk cId="0" sldId="361"/>
-            <ac:spMk id="10" creationId="{00000000-0000-0000-0000-000000000000}"/>
-          </ac:spMkLst>
-        </pc:spChg>
-        <pc:spChg chg="mod">
-          <ac:chgData name="Bryan Sun" userId="851caa7714272873" providerId="LiveId" clId="{1DF0C224-3A3E-55A6-A8D1-F8F2208D385B}" dt="2026-03-25T23:30:39.367" v="366" actId="1076"/>
-          <ac:spMkLst>
-            <pc:docMk/>
-            <pc:sldMk cId="0" sldId="361"/>
-            <ac:spMk id="13" creationId="{00000000-0000-0000-0000-000000000000}"/>
-          </ac:spMkLst>
-        </pc:spChg>
-        <pc:spChg chg="add mod">
-          <ac:chgData name="Bryan Sun" userId="851caa7714272873" providerId="LiveId" clId="{1DF0C224-3A3E-55A6-A8D1-F8F2208D385B}" dt="2026-03-25T23:28:06.364" v="353" actId="1076"/>
-          <ac:spMkLst>
-            <pc:docMk/>
-            <pc:sldMk cId="0" sldId="361"/>
-            <ac:spMk id="14" creationId="{74F69E97-EC8D-E6B9-B5C1-EEB7C971F00F}"/>
-          </ac:spMkLst>
-        </pc:spChg>
-        <pc:spChg chg="add mod">
-          <ac:chgData name="Bryan Sun" userId="851caa7714272873" providerId="LiveId" clId="{1DF0C224-3A3E-55A6-A8D1-F8F2208D385B}" dt="2026-03-25T23:28:08.364" v="354" actId="1076"/>
-          <ac:spMkLst>
-            <pc:docMk/>
-            <pc:sldMk cId="0" sldId="361"/>
-            <ac:spMk id="15" creationId="{7A84950D-CCE4-6649-D29F-177F37E48BBC}"/>
-          </ac:spMkLst>
-        </pc:spChg>
-        <pc:spChg chg="add mod">
-          <ac:chgData name="Bryan Sun" userId="851caa7714272873" providerId="LiveId" clId="{1DF0C224-3A3E-55A6-A8D1-F8F2208D385B}" dt="2026-03-25T23:29:50.585" v="364" actId="1076"/>
-          <ac:spMkLst>
-            <pc:docMk/>
-            <pc:sldMk cId="0" sldId="361"/>
-            <ac:spMk id="18" creationId="{FDCF937E-B6BF-8A40-19E9-7B134A1B82EC}"/>
-          </ac:spMkLst>
-        </pc:spChg>
-        <pc:picChg chg="add mod">
-          <ac:chgData name="Bryan Sun" userId="851caa7714272873" providerId="LiveId" clId="{1DF0C224-3A3E-55A6-A8D1-F8F2208D385B}" dt="2026-03-25T23:27:50.616" v="350" actId="14100"/>
-          <ac:picMkLst>
-            <pc:docMk/>
-            <pc:sldMk cId="0" sldId="361"/>
-            <ac:picMk id="11" creationId="{6F9AB9CA-8495-C181-D906-2488205D67A2}"/>
-          </ac:picMkLst>
-        </pc:picChg>
-        <pc:picChg chg="add mod">
-          <ac:chgData name="Bryan Sun" userId="851caa7714272873" providerId="LiveId" clId="{1DF0C224-3A3E-55A6-A8D1-F8F2208D385B}" dt="2026-03-25T23:28:01.649" v="352" actId="167"/>
-          <ac:picMkLst>
-            <pc:docMk/>
-            <pc:sldMk cId="0" sldId="361"/>
-            <ac:picMk id="16" creationId="{759ED2EA-19EB-A4F9-7E4A-1A7E252763F3}"/>
-          </ac:picMkLst>
-        </pc:picChg>
-        <pc:picChg chg="add mod">
-          <ac:chgData name="Bryan Sun" userId="851caa7714272873" providerId="LiveId" clId="{1DF0C224-3A3E-55A6-A8D1-F8F2208D385B}" dt="2026-03-25T23:29:41.709" v="362" actId="167"/>
-          <ac:picMkLst>
-            <pc:docMk/>
-            <pc:sldMk cId="0" sldId="361"/>
-            <ac:picMk id="17" creationId="{FE859262-343F-496A-240B-8F4AF786E83D}"/>
-          </ac:picMkLst>
-        </pc:picChg>
-      </pc:sldChg>
-      <pc:sldChg chg="addSp delSp modSp mod">
-        <pc:chgData name="Bryan Sun" userId="851caa7714272873" providerId="LiveId" clId="{1DF0C224-3A3E-55A6-A8D1-F8F2208D385B}" dt="2026-03-25T23:49:07.992" v="466" actId="167"/>
-        <pc:sldMkLst>
-          <pc:docMk/>
-          <pc:sldMk cId="0" sldId="362"/>
-        </pc:sldMkLst>
-        <pc:spChg chg="mod">
-          <ac:chgData name="Bryan Sun" userId="851caa7714272873" providerId="LiveId" clId="{1DF0C224-3A3E-55A6-A8D1-F8F2208D385B}" dt="2026-03-25T11:15:52.209" v="282" actId="20577"/>
-          <ac:spMkLst>
-            <pc:docMk/>
-            <pc:sldMk cId="0" sldId="362"/>
-            <ac:spMk id="5" creationId="{00000000-0000-0000-0000-000000000000}"/>
-          </ac:spMkLst>
-        </pc:spChg>
-        <pc:spChg chg="mod">
-          <ac:chgData name="Bryan Sun" userId="851caa7714272873" providerId="LiveId" clId="{1DF0C224-3A3E-55A6-A8D1-F8F2208D385B}" dt="2026-03-25T11:06:48.540" v="135" actId="2711"/>
-          <ac:spMkLst>
-            <pc:docMk/>
-            <pc:sldMk cId="0" sldId="362"/>
-            <ac:spMk id="7" creationId="{00000000-0000-0000-0000-000000000000}"/>
-          </ac:spMkLst>
-        </pc:spChg>
-        <pc:spChg chg="mod">
-          <ac:chgData name="Bryan Sun" userId="851caa7714272873" providerId="LiveId" clId="{1DF0C224-3A3E-55A6-A8D1-F8F2208D385B}" dt="2026-03-25T23:47:53.359" v="420" actId="1035"/>
-          <ac:spMkLst>
-            <pc:docMk/>
-            <pc:sldMk cId="0" sldId="362"/>
-            <ac:spMk id="8" creationId="{00000000-0000-0000-0000-000000000000}"/>
-          </ac:spMkLst>
-        </pc:spChg>
-        <pc:spChg chg="mod">
-          <ac:chgData name="Bryan Sun" userId="851caa7714272873" providerId="LiveId" clId="{1DF0C224-3A3E-55A6-A8D1-F8F2208D385B}" dt="2026-03-25T23:49:05.141" v="465" actId="1076"/>
-          <ac:spMkLst>
-            <pc:docMk/>
-            <pc:sldMk cId="0" sldId="362"/>
-            <ac:spMk id="9" creationId="{00000000-0000-0000-0000-000000000000}"/>
-          </ac:spMkLst>
-        </pc:spChg>
-        <pc:spChg chg="add mod">
-          <ac:chgData name="Bryan Sun" userId="851caa7714272873" providerId="LiveId" clId="{1DF0C224-3A3E-55A6-A8D1-F8F2208D385B}" dt="2026-03-25T23:44:39.477" v="393" actId="14100"/>
-          <ac:spMkLst>
-            <pc:docMk/>
-            <pc:sldMk cId="0" sldId="362"/>
-            <ac:spMk id="10" creationId="{5AA0668E-5768-F967-088B-6FA9816591F9}"/>
-          </ac:spMkLst>
-        </pc:spChg>
-        <pc:spChg chg="add mod">
-          <ac:chgData name="Bryan Sun" userId="851caa7714272873" providerId="LiveId" clId="{1DF0C224-3A3E-55A6-A8D1-F8F2208D385B}" dt="2026-03-25T23:48:14.030" v="436" actId="14100"/>
-          <ac:spMkLst>
-            <pc:docMk/>
-            <pc:sldMk cId="0" sldId="362"/>
-            <ac:spMk id="12" creationId="{E5B9FD79-E891-F6BA-349C-8E961FD70C95}"/>
-          </ac:spMkLst>
-        </pc:spChg>
-        <pc:spChg chg="mod">
-          <ac:chgData name="Bryan Sun" userId="851caa7714272873" providerId="LiveId" clId="{1DF0C224-3A3E-55A6-A8D1-F8F2208D385B}" dt="2026-03-25T23:44:18.526" v="388" actId="1076"/>
-          <ac:spMkLst>
-            <pc:docMk/>
-            <pc:sldMk cId="0" sldId="362"/>
-            <ac:spMk id="13" creationId="{00000000-0000-0000-0000-000000000000}"/>
-          </ac:spMkLst>
-        </pc:spChg>
-        <pc:spChg chg="add mod">
-          <ac:chgData name="Bryan Sun" userId="851caa7714272873" providerId="LiveId" clId="{1DF0C224-3A3E-55A6-A8D1-F8F2208D385B}" dt="2026-03-25T23:48:56.664" v="464" actId="1076"/>
-          <ac:spMkLst>
-            <pc:docMk/>
-            <pc:sldMk cId="0" sldId="362"/>
-            <ac:spMk id="17" creationId="{1D9927C7-1BA9-9CE3-D7F7-AE2AB63DB306}"/>
-          </ac:spMkLst>
-        </pc:spChg>
-        <pc:picChg chg="add mod">
-          <ac:chgData name="Bryan Sun" userId="851caa7714272873" providerId="LiveId" clId="{1DF0C224-3A3E-55A6-A8D1-F8F2208D385B}" dt="2026-03-25T23:31:57.861" v="372" actId="167"/>
-          <ac:picMkLst>
-            <pc:docMk/>
-            <pc:sldMk cId="0" sldId="362"/>
-            <ac:picMk id="2" creationId="{48C4E097-A2E3-ABEE-0028-5508CF2CB371}"/>
-          </ac:picMkLst>
-        </pc:picChg>
-        <pc:picChg chg="add mod">
-          <ac:chgData name="Bryan Sun" userId="851caa7714272873" providerId="LiveId" clId="{1DF0C224-3A3E-55A6-A8D1-F8F2208D385B}" dt="2026-03-25T23:47:48.573" v="410" actId="1036"/>
-          <ac:picMkLst>
-            <pc:docMk/>
-            <pc:sldMk cId="0" sldId="362"/>
-            <ac:picMk id="4" creationId="{F2F98A73-F7F7-49D2-2DD1-0543A7491618}"/>
-          </ac:picMkLst>
-        </pc:picChg>
-        <pc:picChg chg="add mod">
-          <ac:chgData name="Bryan Sun" userId="851caa7714272873" providerId="LiveId" clId="{1DF0C224-3A3E-55A6-A8D1-F8F2208D385B}" dt="2026-03-25T23:44:30.371" v="391" actId="1076"/>
-          <ac:picMkLst>
-            <pc:docMk/>
-            <pc:sldMk cId="0" sldId="362"/>
-            <ac:picMk id="6" creationId="{F18C3BFE-B766-06D8-F6DF-D55EE7511404}"/>
-          </ac:picMkLst>
-        </pc:picChg>
-        <pc:picChg chg="add mod">
-          <ac:chgData name="Bryan Sun" userId="851caa7714272873" providerId="LiveId" clId="{1DF0C224-3A3E-55A6-A8D1-F8F2208D385B}" dt="2026-03-25T23:49:07.992" v="466" actId="167"/>
-          <ac:picMkLst>
-            <pc:docMk/>
-            <pc:sldMk cId="0" sldId="362"/>
-            <ac:picMk id="11" creationId="{F2489B36-977B-57AD-E06E-A046E1E78DC1}"/>
-          </ac:picMkLst>
-        </pc:picChg>
-      </pc:sldChg>
-    </pc:docChg>
-  </pc:docChgLst>
-</pc:chgInfo>
-</file>
-
 <file path=ppt/handoutMasters/handoutMaster1.xml><?xml version="1.0" encoding="utf-8"?>
 <p:handoutMaster xmlns:a="http://schemas.openxmlformats.org/drawingml/2006/main" xmlns:r="http://schemas.openxmlformats.org/officeDocument/2006/relationships" xmlns:p="http://schemas.openxmlformats.org/presentationml/2006/main">
   <p:cSld>
@@ -1114,7 +230,7 @@
           <a:p>
             <a:fld id="{10AEF43D-0357-4278-88A3-68E399B55887}" type="datetimeFigureOut">
               <a:rPr lang="zh-CN" altLang="en-US" smtClean="0"/>
-              <a:t>2026/4/4</a:t>
+              <a:t>2026/8/2</a:t>
             </a:fld>
             <a:endParaRPr lang="zh-CN" altLang="en-US"/>
           </a:p>
@@ -1279,7 +395,7 @@
           <a:p>
             <a:fld id="{88811B5F-5A72-4726-AC3F-C438D330BC78}" type="datetimeFigureOut">
               <a:rPr lang="zh-CN" altLang="en-US" smtClean="0"/>
-              <a:t>2026/4/4</a:t>
+              <a:t>2026/8/2</a:t>
             </a:fld>
             <a:endParaRPr lang="zh-CN" altLang="en-US"/>
           </a:p>
@@ -6425,7 +5541,7 @@
           <a:p>
             <a:fld id="{48A87A34-81AB-432B-8DAE-1953F412C126}" type="datetimeFigureOut">
               <a:rPr lang="en-US" dirty="0"/>
-              <a:t>4/4/26</a:t>
+              <a:t>8/2/26</a:t>
             </a:fld>
             <a:endParaRPr lang="en-US" dirty="0"/>
           </a:p>
@@ -6709,7 +5825,7 @@
           <a:p>
             <a:fld id="{48A87A34-81AB-432B-8DAE-1953F412C126}" type="datetimeFigureOut">
               <a:rPr lang="en-US" dirty="0"/>
-              <a:t>4/4/26</a:t>
+              <a:t>8/2/26</a:t>
             </a:fld>
             <a:endParaRPr lang="en-US" dirty="0"/>
           </a:p>
@@ -6924,7 +6040,7 @@
           <a:p>
             <a:fld id="{48A87A34-81AB-432B-8DAE-1953F412C126}" type="datetimeFigureOut">
               <a:rPr lang="en-US" dirty="0"/>
-              <a:t>4/4/26</a:t>
+              <a:t>8/2/26</a:t>
             </a:fld>
             <a:endParaRPr lang="en-US" dirty="0"/>
           </a:p>
@@ -7206,7 +6322,7 @@
           <a:p>
             <a:fld id="{48A87A34-81AB-432B-8DAE-1953F412C126}" type="datetimeFigureOut">
               <a:rPr lang="en-US" dirty="0"/>
-              <a:t>4/4/26</a:t>
+              <a:t>8/2/26</a:t>
             </a:fld>
             <a:endParaRPr lang="en-US" dirty="0"/>
           </a:p>
@@ -7659,7 +6775,7 @@
           <a:p>
             <a:fld id="{48A87A34-81AB-432B-8DAE-1953F412C126}" type="datetimeFigureOut">
               <a:rPr lang="en-US" dirty="0"/>
-              <a:t>4/4/26</a:t>
+              <a:t>8/2/26</a:t>
             </a:fld>
             <a:endParaRPr lang="en-US" dirty="0"/>
           </a:p>
@@ -8224,7 +7340,7 @@
           <a:p>
             <a:fld id="{48A87A34-81AB-432B-8DAE-1953F412C126}" type="datetimeFigureOut">
               <a:rPr lang="en-US" dirty="0"/>
-              <a:t>4/4/26</a:t>
+              <a:t>8/2/26</a:t>
             </a:fld>
             <a:endParaRPr lang="en-US" dirty="0"/>
           </a:p>
@@ -8963,7 +8079,7 @@
           <a:p>
             <a:fld id="{48A87A34-81AB-432B-8DAE-1953F412C126}" type="datetimeFigureOut">
               <a:rPr lang="en-US" dirty="0"/>
-              <a:t>4/4/26</a:t>
+              <a:t>8/2/26</a:t>
             </a:fld>
             <a:endParaRPr lang="en-US" dirty="0"/>
           </a:p>
@@ -9152,7 +8268,7 @@
           <a:p>
             <a:fld id="{48A87A34-81AB-432B-8DAE-1953F412C126}" type="datetimeFigureOut">
               <a:rPr lang="en-US" dirty="0"/>
-              <a:t>4/4/26</a:t>
+              <a:t>8/2/26</a:t>
             </a:fld>
             <a:endParaRPr lang="en-US" dirty="0"/>
           </a:p>
@@ -9351,7 +8467,7 @@
           <a:p>
             <a:fld id="{48A87A34-81AB-432B-8DAE-1953F412C126}" type="datetimeFigureOut">
               <a:rPr lang="en-US" dirty="0"/>
-              <a:t>4/4/26</a:t>
+              <a:t>8/2/26</a:t>
             </a:fld>
             <a:endParaRPr lang="en-US" dirty="0"/>
           </a:p>
@@ -9540,7 +8656,7 @@
           <a:p>
             <a:fld id="{48A87A34-81AB-432B-8DAE-1953F412C126}" type="datetimeFigureOut">
               <a:rPr lang="en-US" dirty="0"/>
-              <a:t>4/4/26</a:t>
+              <a:t>8/2/26</a:t>
             </a:fld>
             <a:endParaRPr lang="en-US" dirty="0"/>
           </a:p>
@@ -9822,7 +8938,7 @@
           <a:p>
             <a:fld id="{48A87A34-81AB-432B-8DAE-1953F412C126}" type="datetimeFigureOut">
               <a:rPr lang="en-US" dirty="0"/>
-              <a:t>4/4/26</a:t>
+              <a:t>8/2/26</a:t>
             </a:fld>
             <a:endParaRPr lang="en-US" dirty="0"/>
           </a:p>
@@ -10086,7 +9202,7 @@
           <a:p>
             <a:fld id="{48A87A34-81AB-432B-8DAE-1953F412C126}" type="datetimeFigureOut">
               <a:rPr lang="en-US" dirty="0"/>
-              <a:t>4/4/26</a:t>
+              <a:t>8/2/26</a:t>
             </a:fld>
             <a:endParaRPr lang="en-US" dirty="0"/>
           </a:p>
@@ -10499,7 +9615,7 @@
           <a:p>
             <a:fld id="{48A87A34-81AB-432B-8DAE-1953F412C126}" type="datetimeFigureOut">
               <a:rPr lang="en-US" dirty="0"/>
-              <a:t>4/4/26</a:t>
+              <a:t>8/2/26</a:t>
             </a:fld>
             <a:endParaRPr lang="en-US" dirty="0"/>
           </a:p>
@@ -10649,7 +9765,7 @@
           <a:p>
             <a:fld id="{48A87A34-81AB-432B-8DAE-1953F412C126}" type="datetimeFigureOut">
               <a:rPr lang="en-US" dirty="0"/>
-              <a:t>4/4/26</a:t>
+              <a:t>8/2/26</a:t>
             </a:fld>
             <a:endParaRPr lang="en-US" dirty="0"/>
           </a:p>
@@ -10776,7 +9892,7 @@
           <a:p>
             <a:fld id="{48A87A34-81AB-432B-8DAE-1953F412C126}" type="datetimeFigureOut">
               <a:rPr lang="en-US" dirty="0"/>
-              <a:t>4/4/26</a:t>
+              <a:t>8/2/26</a:t>
             </a:fld>
             <a:endParaRPr lang="en-US" dirty="0"/>
           </a:p>
@@ -11057,7 +10173,7 @@
           <a:p>
             <a:fld id="{48A87A34-81AB-432B-8DAE-1953F412C126}" type="datetimeFigureOut">
               <a:rPr lang="en-US" dirty="0"/>
-              <a:t>4/4/26</a:t>
+              <a:t>8/2/26</a:t>
             </a:fld>
             <a:endParaRPr lang="en-US" dirty="0"/>
           </a:p>
@@ -11356,7 +10472,7 @@
           <a:p>
             <a:fld id="{48A87A34-81AB-432B-8DAE-1953F412C126}" type="datetimeFigureOut">
               <a:rPr lang="en-US" dirty="0"/>
-              <a:t>4/4/26</a:t>
+              <a:t>8/2/26</a:t>
             </a:fld>
             <a:endParaRPr lang="en-US" dirty="0"/>
           </a:p>
@@ -13255,6 +12371,26 @@
               <a:t>    </a:t>
             </a:r>
             <a:r>
+              <a:rPr lang="en" altLang="zh-CN" sz="1400" dirty="0" err="1">
+                <a:solidFill>
+                  <a:srgbClr val="000000"/>
+                </a:solidFill>
+                <a:latin typeface="Consolas" panose="020B0609020204030204" pitchFamily="49" charset="0"/>
+                <a:cs typeface="Consolas" panose="020B0609020204030204" pitchFamily="49" charset="0"/>
+              </a:rPr>
+              <a:t>cout</a:t>
+            </a:r>
+            <a:r>
+              <a:rPr lang="zh-CN" altLang="en-US" sz="1400" dirty="0">
+                <a:solidFill>
+                  <a:srgbClr val="000000"/>
+                </a:solidFill>
+                <a:latin typeface="Consolas" panose="020B0609020204030204" pitchFamily="49" charset="0"/>
+                <a:cs typeface="Consolas" panose="020B0609020204030204" pitchFamily="49" charset="0"/>
+              </a:rPr>
+              <a:t> </a:t>
+            </a:r>
+            <a:r>
               <a:rPr lang="en" altLang="zh-CN" sz="1400" dirty="0">
                 <a:solidFill>
                   <a:srgbClr val="000000"/>
@@ -13262,7 +12398,7 @@
                 <a:latin typeface="Consolas" panose="020B0609020204030204" pitchFamily="49" charset="0"/>
                 <a:cs typeface="Consolas" panose="020B0609020204030204" pitchFamily="49" charset="0"/>
               </a:rPr>
-              <a:t>cout&lt;&lt; </a:t>
+              <a:t>&lt;&lt; </a:t>
             </a:r>
             <a:r>
               <a:rPr lang="en" altLang="zh-CN" sz="1400" dirty="0">
@@ -13272,7 +12408,7 @@
                 <a:latin typeface="Consolas" panose="020B0609020204030204" pitchFamily="49" charset="0"/>
                 <a:cs typeface="Consolas" panose="020B0609020204030204" pitchFamily="49" charset="0"/>
               </a:rPr>
-              <a:t>"A</a:t>
+              <a:t>“A</a:t>
             </a:r>
             <a:r>
               <a:rPr lang="en" altLang="en-US" sz="1400" dirty="0">
@@ -13292,7 +12428,7 @@
                 <a:latin typeface="Consolas" panose="020B0609020204030204" pitchFamily="49" charset="0"/>
                 <a:cs typeface="Consolas" panose="020B0609020204030204" pitchFamily="49" charset="0"/>
               </a:rPr>
-              <a:t>: " </a:t>
+              <a:t>: ” </a:t>
             </a:r>
             <a:r>
               <a:rPr lang="en" altLang="zh-CN" sz="1400" dirty="0">
@@ -13300,7 +12436,23 @@
                 <a:ea typeface="微软雅黑" panose="020B0503020204020204" pitchFamily="34" charset="-122"/>
                 <a:cs typeface="Consolas" panose="020B0609020204030204" pitchFamily="49" charset="0"/>
               </a:rPr>
-              <a:t>&lt;&lt;( </a:t>
+              <a:t>&lt;&lt;</a:t>
+            </a:r>
+            <a:r>
+              <a:rPr lang="zh-CN" altLang="en-US" sz="1400" dirty="0">
+                <a:latin typeface="Consolas" panose="020B0609020204030204" pitchFamily="49" charset="0"/>
+                <a:ea typeface="微软雅黑" panose="020B0503020204020204" pitchFamily="34" charset="-122"/>
+                <a:cs typeface="Consolas" panose="020B0609020204030204" pitchFamily="49" charset="0"/>
+              </a:rPr>
+              <a:t> </a:t>
+            </a:r>
+            <a:r>
+              <a:rPr lang="en" altLang="zh-CN" sz="1400" dirty="0">
+                <a:latin typeface="Consolas" panose="020B0609020204030204" pitchFamily="49" charset="0"/>
+                <a:ea typeface="微软雅黑" panose="020B0503020204020204" pitchFamily="34" charset="-122"/>
+                <a:cs typeface="Consolas" panose="020B0609020204030204" pitchFamily="49" charset="0"/>
+              </a:rPr>
+              <a:t>(</a:t>
             </a:r>
             <a:r>
               <a:rPr lang="en" altLang="zh-CN" sz="1400" dirty="0" err="1">
@@ -13316,7 +12468,55 @@
                 <a:ea typeface="微软雅黑" panose="020B0503020204020204" pitchFamily="34" charset="-122"/>
                 <a:cs typeface="Consolas" panose="020B0609020204030204" pitchFamily="49" charset="0"/>
               </a:rPr>
-              <a:t> )*c/2&lt;&lt; </a:t>
+              <a:t>)</a:t>
+            </a:r>
+            <a:r>
+              <a:rPr lang="zh-CN" altLang="en-US" sz="1400" dirty="0">
+                <a:latin typeface="Consolas" panose="020B0609020204030204" pitchFamily="49" charset="0"/>
+                <a:ea typeface="微软雅黑" panose="020B0503020204020204" pitchFamily="34" charset="-122"/>
+                <a:cs typeface="Consolas" panose="020B0609020204030204" pitchFamily="49" charset="0"/>
+              </a:rPr>
+              <a:t> </a:t>
+            </a:r>
+            <a:r>
+              <a:rPr lang="en" altLang="zh-CN" sz="1400" dirty="0">
+                <a:latin typeface="Consolas" panose="020B0609020204030204" pitchFamily="49" charset="0"/>
+                <a:ea typeface="微软雅黑" panose="020B0503020204020204" pitchFamily="34" charset="-122"/>
+                <a:cs typeface="Consolas" panose="020B0609020204030204" pitchFamily="49" charset="0"/>
+              </a:rPr>
+              <a:t>*</a:t>
+            </a:r>
+            <a:r>
+              <a:rPr lang="zh-CN" altLang="en-US" sz="1400" dirty="0">
+                <a:latin typeface="Consolas" panose="020B0609020204030204" pitchFamily="49" charset="0"/>
+                <a:ea typeface="微软雅黑" panose="020B0503020204020204" pitchFamily="34" charset="-122"/>
+                <a:cs typeface="Consolas" panose="020B0609020204030204" pitchFamily="49" charset="0"/>
+              </a:rPr>
+              <a:t> </a:t>
+            </a:r>
+            <a:r>
+              <a:rPr lang="en" altLang="zh-CN" sz="1400" dirty="0">
+                <a:latin typeface="Consolas" panose="020B0609020204030204" pitchFamily="49" charset="0"/>
+                <a:ea typeface="微软雅黑" panose="020B0503020204020204" pitchFamily="34" charset="-122"/>
+                <a:cs typeface="Consolas" panose="020B0609020204030204" pitchFamily="49" charset="0"/>
+              </a:rPr>
+              <a:t>c/2</a:t>
+            </a:r>
+            <a:r>
+              <a:rPr lang="zh-CN" altLang="en-US" sz="1400" dirty="0">
+                <a:latin typeface="Consolas" panose="020B0609020204030204" pitchFamily="49" charset="0"/>
+                <a:ea typeface="微软雅黑" panose="020B0503020204020204" pitchFamily="34" charset="-122"/>
+                <a:cs typeface="Consolas" panose="020B0609020204030204" pitchFamily="49" charset="0"/>
+              </a:rPr>
+              <a:t> </a:t>
+            </a:r>
+            <a:r>
+              <a:rPr lang="en" altLang="zh-CN" sz="1400" dirty="0">
+                <a:latin typeface="Consolas" panose="020B0609020204030204" pitchFamily="49" charset="0"/>
+                <a:ea typeface="微软雅黑" panose="020B0503020204020204" pitchFamily="34" charset="-122"/>
+                <a:cs typeface="Consolas" panose="020B0609020204030204" pitchFamily="49" charset="0"/>
+              </a:rPr>
+              <a:t>&lt;&lt; </a:t>
             </a:r>
             <a:r>
               <a:rPr lang="en" altLang="zh-CN" sz="1400" dirty="0" err="1">
